--- a/public/fun/pack/pptx/birthday/돌잔치_23_사진중심_여름낮잠.pptx
+++ b/public/fun/pack/pptx/birthday/돌잔치_23_사진중심_여름낮잠.pptx
@@ -3347,7 +3347,7 @@
             <a:r>
               <a:rPr sz="4000" b="1" i="0">
                 <a:solidFill>
-                  <a:srgbClr val="314F22"/>
+                  <a:srgbClr val="115F41"/>
                 </a:solidFill>
               </a:rPr>
               <a:t>첫 번째 생일</a:t>
@@ -3385,7 +3385,7 @@
             <a:r>
               <a:rPr sz="1700" b="0" i="1">
                 <a:solidFill>
-                  <a:srgbClr val="314F22"/>
+                  <a:srgbClr val="115F41"/>
                 </a:solidFill>
               </a:rPr>
               <a:t>여름 바닷가에서 찍은 첫 사진도 있습니다</a:t>
@@ -3460,7 +3460,7 @@
     <p:bg>
       <p:bgPr>
         <a:solidFill>
-          <a:srgbClr val="F3F9F1"/>
+          <a:srgbClr val="EEFCF6"/>
         </a:solidFill>
         <a:effectLst/>
       </p:bgPr>
@@ -3487,7 +3487,7 @@
             <a:avLst/>
           </a:prstGeom>
           <a:solidFill>
-            <a:srgbClr val="5D9640"/>
+            <a:srgbClr val="26C588"/>
           </a:solidFill>
           <a:ln>
             <a:noFill/>
@@ -3516,7 +3516,7 @@
             <a:avLst/>
           </a:prstGeom>
           <a:solidFill>
-            <a:srgbClr val="4B3D8F"/>
+            <a:srgbClr val="209DB6"/>
           </a:solidFill>
           <a:ln>
             <a:noFill/>
@@ -3560,7 +3560,7 @@
             <a:r>
               <a:rPr sz="3000" b="1" i="0">
                 <a:solidFill>
-                  <a:srgbClr val="314F22"/>
+                  <a:srgbClr val="115F41"/>
                 </a:solidFill>
               </a:rPr>
               <a:t>우리 아기를 소개합니다</a:t>
@@ -3585,11 +3585,11 @@
             </a:avLst>
           </a:prstGeom>
           <a:solidFill>
-            <a:srgbClr val="DCEED3"/>
+            <a:srgbClr val="D1FAEA"/>
           </a:solidFill>
           <a:ln w="19050">
             <a:solidFill>
-              <a:srgbClr val="5D9640"/>
+              <a:srgbClr val="26C588"/>
             </a:solidFill>
             <a:prstDash val="dash"/>
           </a:ln>
@@ -3608,7 +3608,7 @@
             <a:r>
               <a:rPr sz="1400" b="0" i="0">
                 <a:solidFill>
-                  <a:srgbClr val="314F22"/>
+                  <a:srgbClr val="115F41"/>
                 </a:solidFill>
               </a:rPr>
               <a:t>아기 사진을 넣어 주세요</a:t>
@@ -3648,7 +3648,7 @@
                       <a:r>
                         <a:rPr sz="1500" b="1">
                           <a:solidFill>
-                            <a:srgbClr val="314F22"/>
+                            <a:srgbClr val="115F41"/>
                           </a:solidFill>
                         </a:rPr>
                         <a:t>이름</a:t>
@@ -3658,30 +3658,30 @@
                   <a:tcPr anchor="ctr" marL="73152" marR="73152">
                     <a:lnL w="9525" cap="flat" cmpd="sng" algn="ctr">
                       <a:solidFill>
-                        <a:srgbClr val="DCEED3"/>
+                        <a:srgbClr val="D1FAEA"/>
                       </a:solidFill>
                       <a:prstDash val="solid"/>
                     </a:lnL>
                     <a:lnR w="9525" cap="flat" cmpd="sng" algn="ctr">
                       <a:solidFill>
-                        <a:srgbClr val="DCEED3"/>
+                        <a:srgbClr val="D1FAEA"/>
                       </a:solidFill>
                       <a:prstDash val="solid"/>
                     </a:lnR>
                     <a:lnT w="9525" cap="flat" cmpd="sng" algn="ctr">
                       <a:solidFill>
-                        <a:srgbClr val="DCEED3"/>
+                        <a:srgbClr val="D1FAEA"/>
                       </a:solidFill>
                       <a:prstDash val="solid"/>
                     </a:lnT>
                     <a:lnB w="9525" cap="flat" cmpd="sng" algn="ctr">
                       <a:solidFill>
-                        <a:srgbClr val="DCEED3"/>
+                        <a:srgbClr val="D1FAEA"/>
                       </a:solidFill>
                       <a:prstDash val="solid"/>
                     </a:lnB>
                     <a:solidFill>
-                      <a:srgbClr val="DCEED3"/>
+                      <a:srgbClr val="D1FAEA"/>
                     </a:solidFill>
                   </a:tcPr>
                 </a:tc>
@@ -3704,30 +3704,30 @@
                   <a:tcPr anchor="ctr" marL="73152" marR="73152">
                     <a:lnL w="9525" cap="flat" cmpd="sng" algn="ctr">
                       <a:solidFill>
-                        <a:srgbClr val="DCEED3"/>
+                        <a:srgbClr val="D1FAEA"/>
                       </a:solidFill>
                       <a:prstDash val="solid"/>
                     </a:lnL>
                     <a:lnR w="9525" cap="flat" cmpd="sng" algn="ctr">
                       <a:solidFill>
-                        <a:srgbClr val="DCEED3"/>
+                        <a:srgbClr val="D1FAEA"/>
                       </a:solidFill>
                       <a:prstDash val="solid"/>
                     </a:lnR>
                     <a:lnT w="9525" cap="flat" cmpd="sng" algn="ctr">
                       <a:solidFill>
-                        <a:srgbClr val="DCEED3"/>
+                        <a:srgbClr val="D1FAEA"/>
                       </a:solidFill>
                       <a:prstDash val="solid"/>
                     </a:lnT>
                     <a:lnB w="9525" cap="flat" cmpd="sng" algn="ctr">
                       <a:solidFill>
-                        <a:srgbClr val="DCEED3"/>
+                        <a:srgbClr val="D1FAEA"/>
                       </a:solidFill>
                       <a:prstDash val="solid"/>
                     </a:lnB>
                     <a:solidFill>
-                      <a:srgbClr val="F3F9F1"/>
+                      <a:srgbClr val="EEFCF6"/>
                     </a:solidFill>
                   </a:tcPr>
                 </a:tc>
@@ -3742,7 +3742,7 @@
                       <a:r>
                         <a:rPr sz="1500" b="1">
                           <a:solidFill>
-                            <a:srgbClr val="314F22"/>
+                            <a:srgbClr val="115F41"/>
                           </a:solidFill>
                         </a:rPr>
                         <a:t>생일</a:t>
@@ -3752,30 +3752,30 @@
                   <a:tcPr anchor="ctr" marL="73152" marR="73152">
                     <a:lnL w="9525" cap="flat" cmpd="sng" algn="ctr">
                       <a:solidFill>
-                        <a:srgbClr val="DCEED3"/>
+                        <a:srgbClr val="D1FAEA"/>
                       </a:solidFill>
                       <a:prstDash val="solid"/>
                     </a:lnL>
                     <a:lnR w="9525" cap="flat" cmpd="sng" algn="ctr">
                       <a:solidFill>
-                        <a:srgbClr val="DCEED3"/>
+                        <a:srgbClr val="D1FAEA"/>
                       </a:solidFill>
                       <a:prstDash val="solid"/>
                     </a:lnR>
                     <a:lnT w="9525" cap="flat" cmpd="sng" algn="ctr">
                       <a:solidFill>
-                        <a:srgbClr val="DCEED3"/>
+                        <a:srgbClr val="D1FAEA"/>
                       </a:solidFill>
                       <a:prstDash val="solid"/>
                     </a:lnT>
                     <a:lnB w="9525" cap="flat" cmpd="sng" algn="ctr">
                       <a:solidFill>
-                        <a:srgbClr val="DCEED3"/>
+                        <a:srgbClr val="D1FAEA"/>
                       </a:solidFill>
                       <a:prstDash val="solid"/>
                     </a:lnB>
                     <a:solidFill>
-                      <a:srgbClr val="DCEED3"/>
+                      <a:srgbClr val="D1FAEA"/>
                     </a:solidFill>
                   </a:tcPr>
                 </a:tc>
@@ -3798,25 +3798,25 @@
                   <a:tcPr anchor="ctr" marL="73152" marR="73152">
                     <a:lnL w="9525" cap="flat" cmpd="sng" algn="ctr">
                       <a:solidFill>
-                        <a:srgbClr val="DCEED3"/>
+                        <a:srgbClr val="D1FAEA"/>
                       </a:solidFill>
                       <a:prstDash val="solid"/>
                     </a:lnL>
                     <a:lnR w="9525" cap="flat" cmpd="sng" algn="ctr">
                       <a:solidFill>
-                        <a:srgbClr val="DCEED3"/>
+                        <a:srgbClr val="D1FAEA"/>
                       </a:solidFill>
                       <a:prstDash val="solid"/>
                     </a:lnR>
                     <a:lnT w="9525" cap="flat" cmpd="sng" algn="ctr">
                       <a:solidFill>
-                        <a:srgbClr val="DCEED3"/>
+                        <a:srgbClr val="D1FAEA"/>
                       </a:solidFill>
                       <a:prstDash val="solid"/>
                     </a:lnT>
                     <a:lnB w="9525" cap="flat" cmpd="sng" algn="ctr">
                       <a:solidFill>
-                        <a:srgbClr val="DCEED3"/>
+                        <a:srgbClr val="D1FAEA"/>
                       </a:solidFill>
                       <a:prstDash val="solid"/>
                     </a:lnB>
@@ -3836,7 +3836,7 @@
                       <a:r>
                         <a:rPr sz="1500" b="1">
                           <a:solidFill>
-                            <a:srgbClr val="314F22"/>
+                            <a:srgbClr val="115F41"/>
                           </a:solidFill>
                         </a:rPr>
                         <a:t>키 · 몸무게</a:t>
@@ -3846,30 +3846,30 @@
                   <a:tcPr anchor="ctr" marL="73152" marR="73152">
                     <a:lnL w="9525" cap="flat" cmpd="sng" algn="ctr">
                       <a:solidFill>
-                        <a:srgbClr val="DCEED3"/>
+                        <a:srgbClr val="D1FAEA"/>
                       </a:solidFill>
                       <a:prstDash val="solid"/>
                     </a:lnL>
                     <a:lnR w="9525" cap="flat" cmpd="sng" algn="ctr">
                       <a:solidFill>
-                        <a:srgbClr val="DCEED3"/>
+                        <a:srgbClr val="D1FAEA"/>
                       </a:solidFill>
                       <a:prstDash val="solid"/>
                     </a:lnR>
                     <a:lnT w="9525" cap="flat" cmpd="sng" algn="ctr">
                       <a:solidFill>
-                        <a:srgbClr val="DCEED3"/>
+                        <a:srgbClr val="D1FAEA"/>
                       </a:solidFill>
                       <a:prstDash val="solid"/>
                     </a:lnT>
                     <a:lnB w="9525" cap="flat" cmpd="sng" algn="ctr">
                       <a:solidFill>
-                        <a:srgbClr val="DCEED3"/>
+                        <a:srgbClr val="D1FAEA"/>
                       </a:solidFill>
                       <a:prstDash val="solid"/>
                     </a:lnB>
                     <a:solidFill>
-                      <a:srgbClr val="DCEED3"/>
+                      <a:srgbClr val="D1FAEA"/>
                     </a:solidFill>
                   </a:tcPr>
                 </a:tc>
@@ -3892,30 +3892,30 @@
                   <a:tcPr anchor="ctr" marL="73152" marR="73152">
                     <a:lnL w="9525" cap="flat" cmpd="sng" algn="ctr">
                       <a:solidFill>
-                        <a:srgbClr val="DCEED3"/>
+                        <a:srgbClr val="D1FAEA"/>
                       </a:solidFill>
                       <a:prstDash val="solid"/>
                     </a:lnL>
                     <a:lnR w="9525" cap="flat" cmpd="sng" algn="ctr">
                       <a:solidFill>
-                        <a:srgbClr val="DCEED3"/>
+                        <a:srgbClr val="D1FAEA"/>
                       </a:solidFill>
                       <a:prstDash val="solid"/>
                     </a:lnR>
                     <a:lnT w="9525" cap="flat" cmpd="sng" algn="ctr">
                       <a:solidFill>
-                        <a:srgbClr val="DCEED3"/>
+                        <a:srgbClr val="D1FAEA"/>
                       </a:solidFill>
                       <a:prstDash val="solid"/>
                     </a:lnT>
                     <a:lnB w="9525" cap="flat" cmpd="sng" algn="ctr">
                       <a:solidFill>
-                        <a:srgbClr val="DCEED3"/>
+                        <a:srgbClr val="D1FAEA"/>
                       </a:solidFill>
                       <a:prstDash val="solid"/>
                     </a:lnB>
                     <a:solidFill>
-                      <a:srgbClr val="F3F9F1"/>
+                      <a:srgbClr val="EEFCF6"/>
                     </a:solidFill>
                   </a:tcPr>
                 </a:tc>
@@ -3930,7 +3930,7 @@
                       <a:r>
                         <a:rPr sz="1500" b="1">
                           <a:solidFill>
-                            <a:srgbClr val="314F22"/>
+                            <a:srgbClr val="115F41"/>
                           </a:solidFill>
                         </a:rPr>
                         <a:t>좋아하는 것</a:t>
@@ -3940,30 +3940,30 @@
                   <a:tcPr anchor="ctr" marL="73152" marR="73152">
                     <a:lnL w="9525" cap="flat" cmpd="sng" algn="ctr">
                       <a:solidFill>
-                        <a:srgbClr val="DCEED3"/>
+                        <a:srgbClr val="D1FAEA"/>
                       </a:solidFill>
                       <a:prstDash val="solid"/>
                     </a:lnL>
                     <a:lnR w="9525" cap="flat" cmpd="sng" algn="ctr">
                       <a:solidFill>
-                        <a:srgbClr val="DCEED3"/>
+                        <a:srgbClr val="D1FAEA"/>
                       </a:solidFill>
                       <a:prstDash val="solid"/>
                     </a:lnR>
                     <a:lnT w="9525" cap="flat" cmpd="sng" algn="ctr">
                       <a:solidFill>
-                        <a:srgbClr val="DCEED3"/>
+                        <a:srgbClr val="D1FAEA"/>
                       </a:solidFill>
                       <a:prstDash val="solid"/>
                     </a:lnT>
                     <a:lnB w="9525" cap="flat" cmpd="sng" algn="ctr">
                       <a:solidFill>
-                        <a:srgbClr val="DCEED3"/>
+                        <a:srgbClr val="D1FAEA"/>
                       </a:solidFill>
                       <a:prstDash val="solid"/>
                     </a:lnB>
                     <a:solidFill>
-                      <a:srgbClr val="DCEED3"/>
+                      <a:srgbClr val="D1FAEA"/>
                     </a:solidFill>
                   </a:tcPr>
                 </a:tc>
@@ -3986,25 +3986,25 @@
                   <a:tcPr anchor="ctr" marL="73152" marR="73152">
                     <a:lnL w="9525" cap="flat" cmpd="sng" algn="ctr">
                       <a:solidFill>
-                        <a:srgbClr val="DCEED3"/>
+                        <a:srgbClr val="D1FAEA"/>
                       </a:solidFill>
                       <a:prstDash val="solid"/>
                     </a:lnL>
                     <a:lnR w="9525" cap="flat" cmpd="sng" algn="ctr">
                       <a:solidFill>
-                        <a:srgbClr val="DCEED3"/>
+                        <a:srgbClr val="D1FAEA"/>
                       </a:solidFill>
                       <a:prstDash val="solid"/>
                     </a:lnR>
                     <a:lnT w="9525" cap="flat" cmpd="sng" algn="ctr">
                       <a:solidFill>
-                        <a:srgbClr val="DCEED3"/>
+                        <a:srgbClr val="D1FAEA"/>
                       </a:solidFill>
                       <a:prstDash val="solid"/>
                     </a:lnT>
                     <a:lnB w="9525" cap="flat" cmpd="sng" algn="ctr">
                       <a:solidFill>
-                        <a:srgbClr val="DCEED3"/>
+                        <a:srgbClr val="D1FAEA"/>
                       </a:solidFill>
                       <a:prstDash val="solid"/>
                     </a:lnB>
@@ -4024,7 +4024,7 @@
                       <a:r>
                         <a:rPr sz="1500" b="1">
                           <a:solidFill>
-                            <a:srgbClr val="314F22"/>
+                            <a:srgbClr val="115F41"/>
                           </a:solidFill>
                         </a:rPr>
                         <a:t>별명</a:t>
@@ -4034,30 +4034,30 @@
                   <a:tcPr anchor="ctr" marL="73152" marR="73152">
                     <a:lnL w="9525" cap="flat" cmpd="sng" algn="ctr">
                       <a:solidFill>
-                        <a:srgbClr val="DCEED3"/>
+                        <a:srgbClr val="D1FAEA"/>
                       </a:solidFill>
                       <a:prstDash val="solid"/>
                     </a:lnL>
                     <a:lnR w="9525" cap="flat" cmpd="sng" algn="ctr">
                       <a:solidFill>
-                        <a:srgbClr val="DCEED3"/>
+                        <a:srgbClr val="D1FAEA"/>
                       </a:solidFill>
                       <a:prstDash val="solid"/>
                     </a:lnR>
                     <a:lnT w="9525" cap="flat" cmpd="sng" algn="ctr">
                       <a:solidFill>
-                        <a:srgbClr val="DCEED3"/>
+                        <a:srgbClr val="D1FAEA"/>
                       </a:solidFill>
                       <a:prstDash val="solid"/>
                     </a:lnT>
                     <a:lnB w="9525" cap="flat" cmpd="sng" algn="ctr">
                       <a:solidFill>
-                        <a:srgbClr val="DCEED3"/>
+                        <a:srgbClr val="D1FAEA"/>
                       </a:solidFill>
                       <a:prstDash val="solid"/>
                     </a:lnB>
                     <a:solidFill>
-                      <a:srgbClr val="DCEED3"/>
+                      <a:srgbClr val="D1FAEA"/>
                     </a:solidFill>
                   </a:tcPr>
                 </a:tc>
@@ -4080,30 +4080,30 @@
                   <a:tcPr anchor="ctr" marL="73152" marR="73152">
                     <a:lnL w="9525" cap="flat" cmpd="sng" algn="ctr">
                       <a:solidFill>
-                        <a:srgbClr val="DCEED3"/>
+                        <a:srgbClr val="D1FAEA"/>
                       </a:solidFill>
                       <a:prstDash val="solid"/>
                     </a:lnL>
                     <a:lnR w="9525" cap="flat" cmpd="sng" algn="ctr">
                       <a:solidFill>
-                        <a:srgbClr val="DCEED3"/>
+                        <a:srgbClr val="D1FAEA"/>
                       </a:solidFill>
                       <a:prstDash val="solid"/>
                     </a:lnR>
                     <a:lnT w="9525" cap="flat" cmpd="sng" algn="ctr">
                       <a:solidFill>
-                        <a:srgbClr val="DCEED3"/>
+                        <a:srgbClr val="D1FAEA"/>
                       </a:solidFill>
                       <a:prstDash val="solid"/>
                     </a:lnT>
                     <a:lnB w="9525" cap="flat" cmpd="sng" algn="ctr">
                       <a:solidFill>
-                        <a:srgbClr val="DCEED3"/>
+                        <a:srgbClr val="D1FAEA"/>
                       </a:solidFill>
                       <a:prstDash val="solid"/>
                     </a:lnB>
                     <a:solidFill>
-                      <a:srgbClr val="F3F9F1"/>
+                      <a:srgbClr val="EEFCF6"/>
                     </a:solidFill>
                   </a:tcPr>
                 </a:tc>
@@ -4118,7 +4118,7 @@
                       <a:r>
                         <a:rPr sz="1500" b="1">
                           <a:solidFill>
-                            <a:srgbClr val="314F22"/>
+                            <a:srgbClr val="115F41"/>
                           </a:solidFill>
                         </a:rPr>
                         <a:t>부모의 마음</a:t>
@@ -4128,30 +4128,30 @@
                   <a:tcPr anchor="ctr" marL="73152" marR="73152">
                     <a:lnL w="9525" cap="flat" cmpd="sng" algn="ctr">
                       <a:solidFill>
-                        <a:srgbClr val="DCEED3"/>
+                        <a:srgbClr val="D1FAEA"/>
                       </a:solidFill>
                       <a:prstDash val="solid"/>
                     </a:lnL>
                     <a:lnR w="9525" cap="flat" cmpd="sng" algn="ctr">
                       <a:solidFill>
-                        <a:srgbClr val="DCEED3"/>
+                        <a:srgbClr val="D1FAEA"/>
                       </a:solidFill>
                       <a:prstDash val="solid"/>
                     </a:lnR>
                     <a:lnT w="9525" cap="flat" cmpd="sng" algn="ctr">
                       <a:solidFill>
-                        <a:srgbClr val="DCEED3"/>
+                        <a:srgbClr val="D1FAEA"/>
                       </a:solidFill>
                       <a:prstDash val="solid"/>
                     </a:lnT>
                     <a:lnB w="9525" cap="flat" cmpd="sng" algn="ctr">
                       <a:solidFill>
-                        <a:srgbClr val="DCEED3"/>
+                        <a:srgbClr val="D1FAEA"/>
                       </a:solidFill>
                       <a:prstDash val="solid"/>
                     </a:lnB>
                     <a:solidFill>
-                      <a:srgbClr val="DCEED3"/>
+                      <a:srgbClr val="D1FAEA"/>
                     </a:solidFill>
                   </a:tcPr>
                 </a:tc>
@@ -4174,25 +4174,25 @@
                   <a:tcPr anchor="ctr" marL="73152" marR="73152">
                     <a:lnL w="9525" cap="flat" cmpd="sng" algn="ctr">
                       <a:solidFill>
-                        <a:srgbClr val="DCEED3"/>
+                        <a:srgbClr val="D1FAEA"/>
                       </a:solidFill>
                       <a:prstDash val="solid"/>
                     </a:lnL>
                     <a:lnR w="9525" cap="flat" cmpd="sng" algn="ctr">
                       <a:solidFill>
-                        <a:srgbClr val="DCEED3"/>
+                        <a:srgbClr val="D1FAEA"/>
                       </a:solidFill>
                       <a:prstDash val="solid"/>
                     </a:lnR>
                     <a:lnT w="9525" cap="flat" cmpd="sng" algn="ctr">
                       <a:solidFill>
-                        <a:srgbClr val="DCEED3"/>
+                        <a:srgbClr val="D1FAEA"/>
                       </a:solidFill>
                       <a:prstDash val="solid"/>
                     </a:lnT>
                     <a:lnB w="9525" cap="flat" cmpd="sng" algn="ctr">
                       <a:solidFill>
-                        <a:srgbClr val="DCEED3"/>
+                        <a:srgbClr val="D1FAEA"/>
                       </a:solidFill>
                       <a:prstDash val="solid"/>
                     </a:lnB>
@@ -4220,7 +4220,7 @@
     <p:bg>
       <p:bgPr>
         <a:solidFill>
-          <a:srgbClr val="F3F9F1"/>
+          <a:srgbClr val="EEFCF6"/>
         </a:solidFill>
         <a:effectLst/>
       </p:bgPr>
@@ -4247,7 +4247,7 @@
             <a:avLst/>
           </a:prstGeom>
           <a:solidFill>
-            <a:srgbClr val="5D9640"/>
+            <a:srgbClr val="26C588"/>
           </a:solidFill>
           <a:ln>
             <a:noFill/>
@@ -4276,7 +4276,7 @@
             <a:avLst/>
           </a:prstGeom>
           <a:solidFill>
-            <a:srgbClr val="4B3D8F"/>
+            <a:srgbClr val="209DB6"/>
           </a:solidFill>
           <a:ln>
             <a:noFill/>
@@ -4320,7 +4320,7 @@
             <a:r>
               <a:rPr sz="3000" b="1" i="0">
                 <a:solidFill>
-                  <a:srgbClr val="314F22"/>
+                  <a:srgbClr val="115F41"/>
                 </a:solidFill>
               </a:rPr>
               <a:t>첫 번째 생일 사진</a:t>
@@ -4345,11 +4345,11 @@
             </a:avLst>
           </a:prstGeom>
           <a:solidFill>
-            <a:srgbClr val="DCEED3"/>
+            <a:srgbClr val="D1FAEA"/>
           </a:solidFill>
           <a:ln w="19050">
             <a:solidFill>
-              <a:srgbClr val="5D9640"/>
+              <a:srgbClr val="26C588"/>
             </a:solidFill>
             <a:prstDash val="dash"/>
           </a:ln>
@@ -4368,7 +4368,7 @@
             <a:r>
               <a:rPr sz="1400" b="0" i="0">
                 <a:solidFill>
-                  <a:srgbClr val="314F22"/>
+                  <a:srgbClr val="115F41"/>
                 </a:solidFill>
               </a:rPr>
               <a:t>대표 사진 1</a:t>
@@ -4393,11 +4393,11 @@
             </a:avLst>
           </a:prstGeom>
           <a:solidFill>
-            <a:srgbClr val="DCEED3"/>
+            <a:srgbClr val="D1FAEA"/>
           </a:solidFill>
           <a:ln w="19050">
             <a:solidFill>
-              <a:srgbClr val="5D9640"/>
+              <a:srgbClr val="26C588"/>
             </a:solidFill>
             <a:prstDash val="dash"/>
           </a:ln>
@@ -4416,7 +4416,7 @@
             <a:r>
               <a:rPr sz="1400" b="0" i="0">
                 <a:solidFill>
-                  <a:srgbClr val="314F22"/>
+                  <a:srgbClr val="115F41"/>
                 </a:solidFill>
               </a:rPr>
               <a:t>대표 사진 2</a:t>
@@ -4438,7 +4438,7 @@
     <p:bg>
       <p:bgPr>
         <a:solidFill>
-          <a:srgbClr val="F3F9F1"/>
+          <a:srgbClr val="EEFCF6"/>
         </a:solidFill>
         <a:effectLst/>
       </p:bgPr>
@@ -4465,7 +4465,7 @@
             <a:avLst/>
           </a:prstGeom>
           <a:solidFill>
-            <a:srgbClr val="5D9640"/>
+            <a:srgbClr val="26C588"/>
           </a:solidFill>
           <a:ln>
             <a:noFill/>
@@ -4494,7 +4494,7 @@
             <a:avLst/>
           </a:prstGeom>
           <a:solidFill>
-            <a:srgbClr val="4B3D8F"/>
+            <a:srgbClr val="209DB6"/>
           </a:solidFill>
           <a:ln>
             <a:noFill/>
@@ -4538,7 +4538,7 @@
             <a:r>
               <a:rPr sz="3000" b="1" i="0">
                 <a:solidFill>
-                  <a:srgbClr val="314F22"/>
+                  <a:srgbClr val="115F41"/>
                 </a:solidFill>
               </a:rPr>
               <a:t>한 해의 순간들</a:t>
@@ -4563,11 +4563,11 @@
             </a:avLst>
           </a:prstGeom>
           <a:solidFill>
-            <a:srgbClr val="DCEED3"/>
+            <a:srgbClr val="D1FAEA"/>
           </a:solidFill>
           <a:ln w="19050">
             <a:solidFill>
-              <a:srgbClr val="5D9640"/>
+              <a:srgbClr val="26C588"/>
             </a:solidFill>
             <a:prstDash val="dash"/>
           </a:ln>
@@ -4586,7 +4586,7 @@
             <a:r>
               <a:rPr sz="1200" b="0" i="0">
                 <a:solidFill>
-                  <a:srgbClr val="314F22"/>
+                  <a:srgbClr val="115F41"/>
                 </a:solidFill>
               </a:rPr>
               <a:t>사진 1</a:t>
@@ -4611,11 +4611,11 @@
             </a:avLst>
           </a:prstGeom>
           <a:solidFill>
-            <a:srgbClr val="DCEED3"/>
+            <a:srgbClr val="D1FAEA"/>
           </a:solidFill>
           <a:ln w="19050">
             <a:solidFill>
-              <a:srgbClr val="5D9640"/>
+              <a:srgbClr val="26C588"/>
             </a:solidFill>
             <a:prstDash val="dash"/>
           </a:ln>
@@ -4634,7 +4634,7 @@
             <a:r>
               <a:rPr sz="1200" b="0" i="0">
                 <a:solidFill>
-                  <a:srgbClr val="314F22"/>
+                  <a:srgbClr val="115F41"/>
                 </a:solidFill>
               </a:rPr>
               <a:t>사진 2</a:t>
@@ -4659,11 +4659,11 @@
             </a:avLst>
           </a:prstGeom>
           <a:solidFill>
-            <a:srgbClr val="DCEED3"/>
+            <a:srgbClr val="D1FAEA"/>
           </a:solidFill>
           <a:ln w="19050">
             <a:solidFill>
-              <a:srgbClr val="5D9640"/>
+              <a:srgbClr val="26C588"/>
             </a:solidFill>
             <a:prstDash val="dash"/>
           </a:ln>
@@ -4682,7 +4682,7 @@
             <a:r>
               <a:rPr sz="1200" b="0" i="0">
                 <a:solidFill>
-                  <a:srgbClr val="314F22"/>
+                  <a:srgbClr val="115F41"/>
                 </a:solidFill>
               </a:rPr>
               <a:t>사진 3</a:t>
@@ -4707,11 +4707,11 @@
             </a:avLst>
           </a:prstGeom>
           <a:solidFill>
-            <a:srgbClr val="DCEED3"/>
+            <a:srgbClr val="D1FAEA"/>
           </a:solidFill>
           <a:ln w="19050">
             <a:solidFill>
-              <a:srgbClr val="5D9640"/>
+              <a:srgbClr val="26C588"/>
             </a:solidFill>
             <a:prstDash val="dash"/>
           </a:ln>
@@ -4730,7 +4730,7 @@
             <a:r>
               <a:rPr sz="1200" b="0" i="0">
                 <a:solidFill>
-                  <a:srgbClr val="314F22"/>
+                  <a:srgbClr val="115F41"/>
                 </a:solidFill>
               </a:rPr>
               <a:t>사진 4</a:t>
@@ -4755,11 +4755,11 @@
             </a:avLst>
           </a:prstGeom>
           <a:solidFill>
-            <a:srgbClr val="DCEED3"/>
+            <a:srgbClr val="D1FAEA"/>
           </a:solidFill>
           <a:ln w="19050">
             <a:solidFill>
-              <a:srgbClr val="5D9640"/>
+              <a:srgbClr val="26C588"/>
             </a:solidFill>
             <a:prstDash val="dash"/>
           </a:ln>
@@ -4778,7 +4778,7 @@
             <a:r>
               <a:rPr sz="1200" b="0" i="0">
                 <a:solidFill>
-                  <a:srgbClr val="314F22"/>
+                  <a:srgbClr val="115F41"/>
                 </a:solidFill>
               </a:rPr>
               <a:t>사진 5</a:t>
@@ -4803,11 +4803,11 @@
             </a:avLst>
           </a:prstGeom>
           <a:solidFill>
-            <a:srgbClr val="DCEED3"/>
+            <a:srgbClr val="D1FAEA"/>
           </a:solidFill>
           <a:ln w="19050">
             <a:solidFill>
-              <a:srgbClr val="5D9640"/>
+              <a:srgbClr val="26C588"/>
             </a:solidFill>
             <a:prstDash val="dash"/>
           </a:ln>
@@ -4826,7 +4826,7 @@
             <a:r>
               <a:rPr sz="1200" b="0" i="0">
                 <a:solidFill>
-                  <a:srgbClr val="314F22"/>
+                  <a:srgbClr val="115F41"/>
                 </a:solidFill>
               </a:rPr>
               <a:t>사진 6</a:t>
@@ -4848,7 +4848,7 @@
     <p:bg>
       <p:bgPr>
         <a:solidFill>
-          <a:srgbClr val="F3F9F1"/>
+          <a:srgbClr val="EEFCF6"/>
         </a:solidFill>
         <a:effectLst/>
       </p:bgPr>
@@ -4875,7 +4875,7 @@
             <a:avLst/>
           </a:prstGeom>
           <a:solidFill>
-            <a:srgbClr val="5D9640"/>
+            <a:srgbClr val="26C588"/>
           </a:solidFill>
           <a:ln>
             <a:noFill/>
@@ -4904,7 +4904,7 @@
             <a:avLst/>
           </a:prstGeom>
           <a:solidFill>
-            <a:srgbClr val="4B3D8F"/>
+            <a:srgbClr val="209DB6"/>
           </a:solidFill>
           <a:ln>
             <a:noFill/>
@@ -4948,7 +4948,7 @@
             <a:r>
               <a:rPr sz="3000" b="1" i="0">
                 <a:solidFill>
-                  <a:srgbClr val="314F22"/>
+                  <a:srgbClr val="115F41"/>
                 </a:solidFill>
               </a:rPr>
               <a:t>사진 모음</a:t>
@@ -4973,11 +4973,11 @@
             </a:avLst>
           </a:prstGeom>
           <a:solidFill>
-            <a:srgbClr val="DCEED3"/>
+            <a:srgbClr val="D1FAEA"/>
           </a:solidFill>
           <a:ln w="19050">
             <a:solidFill>
-              <a:srgbClr val="5D9640"/>
+              <a:srgbClr val="26C588"/>
             </a:solidFill>
             <a:prstDash val="dash"/>
           </a:ln>
@@ -4996,7 +4996,7 @@
             <a:r>
               <a:rPr sz="1200" b="0" i="0">
                 <a:solidFill>
-                  <a:srgbClr val="314F22"/>
+                  <a:srgbClr val="115F41"/>
                 </a:solidFill>
               </a:rPr>
               <a:t>사진 1</a:t>
@@ -5021,11 +5021,11 @@
             </a:avLst>
           </a:prstGeom>
           <a:solidFill>
-            <a:srgbClr val="DCEED3"/>
+            <a:srgbClr val="D1FAEA"/>
           </a:solidFill>
           <a:ln w="19050">
             <a:solidFill>
-              <a:srgbClr val="5D9640"/>
+              <a:srgbClr val="26C588"/>
             </a:solidFill>
             <a:prstDash val="dash"/>
           </a:ln>
@@ -5044,7 +5044,7 @@
             <a:r>
               <a:rPr sz="1200" b="0" i="0">
                 <a:solidFill>
-                  <a:srgbClr val="314F22"/>
+                  <a:srgbClr val="115F41"/>
                 </a:solidFill>
               </a:rPr>
               <a:t>사진 2</a:t>
@@ -5069,11 +5069,11 @@
             </a:avLst>
           </a:prstGeom>
           <a:solidFill>
-            <a:srgbClr val="DCEED3"/>
+            <a:srgbClr val="D1FAEA"/>
           </a:solidFill>
           <a:ln w="19050">
             <a:solidFill>
-              <a:srgbClr val="5D9640"/>
+              <a:srgbClr val="26C588"/>
             </a:solidFill>
             <a:prstDash val="dash"/>
           </a:ln>
@@ -5092,7 +5092,7 @@
             <a:r>
               <a:rPr sz="1200" b="0" i="0">
                 <a:solidFill>
-                  <a:srgbClr val="314F22"/>
+                  <a:srgbClr val="115F41"/>
                 </a:solidFill>
               </a:rPr>
               <a:t>사진 3</a:t>
@@ -5117,11 +5117,11 @@
             </a:avLst>
           </a:prstGeom>
           <a:solidFill>
-            <a:srgbClr val="DCEED3"/>
+            <a:srgbClr val="D1FAEA"/>
           </a:solidFill>
           <a:ln w="19050">
             <a:solidFill>
-              <a:srgbClr val="5D9640"/>
+              <a:srgbClr val="26C588"/>
             </a:solidFill>
             <a:prstDash val="dash"/>
           </a:ln>
@@ -5140,7 +5140,7 @@
             <a:r>
               <a:rPr sz="1200" b="0" i="0">
                 <a:solidFill>
-                  <a:srgbClr val="314F22"/>
+                  <a:srgbClr val="115F41"/>
                 </a:solidFill>
               </a:rPr>
               <a:t>사진 4</a:t>
@@ -5165,11 +5165,11 @@
             </a:avLst>
           </a:prstGeom>
           <a:solidFill>
-            <a:srgbClr val="DCEED3"/>
+            <a:srgbClr val="D1FAEA"/>
           </a:solidFill>
           <a:ln w="19050">
             <a:solidFill>
-              <a:srgbClr val="5D9640"/>
+              <a:srgbClr val="26C588"/>
             </a:solidFill>
             <a:prstDash val="dash"/>
           </a:ln>
@@ -5188,7 +5188,7 @@
             <a:r>
               <a:rPr sz="1200" b="0" i="0">
                 <a:solidFill>
-                  <a:srgbClr val="314F22"/>
+                  <a:srgbClr val="115F41"/>
                 </a:solidFill>
               </a:rPr>
               <a:t>사진 5</a:t>
@@ -5213,11 +5213,11 @@
             </a:avLst>
           </a:prstGeom>
           <a:solidFill>
-            <a:srgbClr val="DCEED3"/>
+            <a:srgbClr val="D1FAEA"/>
           </a:solidFill>
           <a:ln w="19050">
             <a:solidFill>
-              <a:srgbClr val="5D9640"/>
+              <a:srgbClr val="26C588"/>
             </a:solidFill>
             <a:prstDash val="dash"/>
           </a:ln>
@@ -5236,7 +5236,7 @@
             <a:r>
               <a:rPr sz="1200" b="0" i="0">
                 <a:solidFill>
-                  <a:srgbClr val="314F22"/>
+                  <a:srgbClr val="115F41"/>
                 </a:solidFill>
               </a:rPr>
               <a:t>사진 6</a:t>
@@ -5261,11 +5261,11 @@
             </a:avLst>
           </a:prstGeom>
           <a:solidFill>
-            <a:srgbClr val="DCEED3"/>
+            <a:srgbClr val="D1FAEA"/>
           </a:solidFill>
           <a:ln w="19050">
             <a:solidFill>
-              <a:srgbClr val="5D9640"/>
+              <a:srgbClr val="26C588"/>
             </a:solidFill>
             <a:prstDash val="dash"/>
           </a:ln>
@@ -5284,7 +5284,7 @@
             <a:r>
               <a:rPr sz="1200" b="0" i="0">
                 <a:solidFill>
-                  <a:srgbClr val="314F22"/>
+                  <a:srgbClr val="115F41"/>
                 </a:solidFill>
               </a:rPr>
               <a:t>사진 7</a:t>
@@ -5309,11 +5309,11 @@
             </a:avLst>
           </a:prstGeom>
           <a:solidFill>
-            <a:srgbClr val="DCEED3"/>
+            <a:srgbClr val="D1FAEA"/>
           </a:solidFill>
           <a:ln w="19050">
             <a:solidFill>
-              <a:srgbClr val="5D9640"/>
+              <a:srgbClr val="26C588"/>
             </a:solidFill>
             <a:prstDash val="dash"/>
           </a:ln>
@@ -5332,7 +5332,7 @@
             <a:r>
               <a:rPr sz="1200" b="0" i="0">
                 <a:solidFill>
-                  <a:srgbClr val="314F22"/>
+                  <a:srgbClr val="115F41"/>
                 </a:solidFill>
               </a:rPr>
               <a:t>사진 8</a:t>
@@ -5412,7 +5412,7 @@
             <a:r>
               <a:rPr sz="3400" b="1" i="0">
                 <a:solidFill>
-                  <a:srgbClr val="314F22"/>
+                  <a:srgbClr val="115F41"/>
                 </a:solidFill>
               </a:rPr>
               <a:t>와 주셔서 고맙습니다</a:t>
@@ -5450,7 +5450,7 @@
             <a:r>
               <a:rPr sz="1700" b="0" i="1">
                 <a:solidFill>
-                  <a:srgbClr val="314F22"/>
+                  <a:srgbClr val="115F41"/>
                 </a:solidFill>
               </a:rPr>
               <a:t>아이가 한 살이 되었습니다</a:t>
@@ -5515,34 +5515,34 @@
         <a:sysClr val="window" lastClr="FFFFFF"/>
       </a:lt1>
       <a:dk2>
-        <a:srgbClr val="314F22"/>
+        <a:srgbClr val="115F41"/>
       </a:dk2>
       <a:lt2>
-        <a:srgbClr val="F3F9F1"/>
+        <a:srgbClr val="EEFCF6"/>
       </a:lt2>
       <a:accent1>
-        <a:srgbClr val="5D9640"/>
+        <a:srgbClr val="26C588"/>
       </a:accent1>
       <a:accent2>
-        <a:srgbClr val="4B3D8F"/>
+        <a:srgbClr val="209DB6"/>
       </a:accent2>
       <a:accent3>
-        <a:srgbClr val="314F22"/>
+        <a:srgbClr val="115F41"/>
       </a:accent3>
       <a:accent4>
-        <a:srgbClr val="DCEED3"/>
+        <a:srgbClr val="D1FAEA"/>
       </a:accent4>
       <a:accent5>
-        <a:srgbClr val="546A68"/>
+        <a:srgbClr val="23B19F"/>
       </a:accent5>
       <a:accent6>
-        <a:srgbClr val="83957A"/>
+        <a:srgbClr val="709F8D"/>
       </a:accent6>
       <a:hlink>
-        <a:srgbClr val="5D9640"/>
+        <a:srgbClr val="26C588"/>
       </a:hlink>
       <a:folHlink>
-        <a:srgbClr val="314F22"/>
+        <a:srgbClr val="115F41"/>
       </a:folHlink>
     </a:clrScheme>
     <a:fontScheme name="Office">
